--- a/modules/12-pivoting-tunneling/slides.pptx
+++ b/modules/12-pivoting-tunneling/slides.pptx
@@ -3350,7 +3350,7 @@
             <a:pPr lvl="0" algn="r" rtl="1"/>
             <a:r>
               <a:rPr/>
-              <a:t>משרשרים מנהרות: Kali→P1→P2→עמוק</a:t>
+              <a:t>משרשרים מנהרות: Kali → P1 → P2 → עמוק</a:t>
             </a:r>
           </a:p>
           <a:p>
